--- a/resources/game_texts.pptx
+++ b/resources/game_texts.pptx
@@ -104,6 +104,11 @@
       </a:defRPr>
     </a:lvl9pPr>
   </p:defaultTextStyle>
+  <p:extLst>
+    <p:ext uri="{EFAFB233-063F-42B5-8137-9DF3F51BA10A}">
+      <p15:sldGuideLst xmlns:p15="http://schemas.microsoft.com/office/powerpoint/2012/main"/>
+    </p:ext>
+  </p:extLst>
 </p:presentation>
 </file>
 
@@ -3343,8 +3348,8 @@
         </p:nvSpPr>
         <p:spPr>
           <a:xfrm>
-            <a:off x="2126166" y="1657815"/>
-            <a:ext cx="1263805" cy="369332"/>
+            <a:off x="3270248" y="1646095"/>
+            <a:ext cx="5651502" cy="553998"/>
           </a:xfrm>
           <a:prstGeom prst="rect">
             <a:avLst/>
@@ -3359,12 +3364,95 @@
           <a:p>
             <a:pPr algn="ctr"/>
             <a:r>
-              <a:rPr lang="en-US" dirty="0">
+              <a:rPr lang="en-US" sz="3000" dirty="0">
                 <a:solidFill>
                   <a:schemeClr val="bg1"/>
                 </a:solidFill>
+                <a:latin typeface="Press Start" panose="02000009000000000000" pitchFamily="50" charset="0"/>
               </a:rPr>
-              <a:t>dev scene</a:t>
+              <a:t>DEV_SCENE</a:t>
+            </a:r>
+          </a:p>
+        </p:txBody>
+      </p:sp>
+      <p:sp>
+        <p:nvSpPr>
+          <p:cNvPr id="2" name="TextBox 1">
+            <a:extLst>
+              <a:ext uri="{FF2B5EF4-FFF2-40B4-BE49-F238E27FC236}">
+                <a16:creationId xmlns:a16="http://schemas.microsoft.com/office/drawing/2014/main" id="{674EB4F7-9DE5-3B4A-D091-8D887672CD3E}"/>
+              </a:ext>
+            </a:extLst>
+          </p:cNvPr>
+          <p:cNvSpPr txBox="1"/>
+          <p:nvPr/>
+        </p:nvSpPr>
+        <p:spPr>
+          <a:xfrm>
+            <a:off x="3270248" y="2686773"/>
+            <a:ext cx="5651502" cy="553998"/>
+          </a:xfrm>
+          <a:prstGeom prst="rect">
+            <a:avLst/>
+          </a:prstGeom>
+          <a:noFill/>
+        </p:spPr>
+        <p:txBody>
+          <a:bodyPr wrap="square" rtlCol="0">
+            <a:spAutoFit/>
+          </a:bodyPr>
+          <a:lstStyle/>
+          <a:p>
+            <a:pPr algn="ctr"/>
+            <a:r>
+              <a:rPr lang="en-US" sz="3000" dirty="0">
+                <a:solidFill>
+                  <a:schemeClr val="bg1"/>
+                </a:solidFill>
+                <a:latin typeface="Press Start" panose="02000009000000000000" pitchFamily="50" charset="0"/>
+              </a:rPr>
+              <a:t>TEST_SCENE_1</a:t>
+            </a:r>
+          </a:p>
+        </p:txBody>
+      </p:sp>
+      <p:sp>
+        <p:nvSpPr>
+          <p:cNvPr id="3" name="TextBox 2">
+            <a:extLst>
+              <a:ext uri="{FF2B5EF4-FFF2-40B4-BE49-F238E27FC236}">
+                <a16:creationId xmlns:a16="http://schemas.microsoft.com/office/drawing/2014/main" id="{554FD67C-7F44-6854-10DE-1BAE1FD5C987}"/>
+              </a:ext>
+            </a:extLst>
+          </p:cNvPr>
+          <p:cNvSpPr txBox="1"/>
+          <p:nvPr/>
+        </p:nvSpPr>
+        <p:spPr>
+          <a:xfrm>
+            <a:off x="3270248" y="3727451"/>
+            <a:ext cx="5651502" cy="553998"/>
+          </a:xfrm>
+          <a:prstGeom prst="rect">
+            <a:avLst/>
+          </a:prstGeom>
+          <a:noFill/>
+        </p:spPr>
+        <p:txBody>
+          <a:bodyPr wrap="square" rtlCol="0">
+            <a:spAutoFit/>
+          </a:bodyPr>
+          <a:lstStyle/>
+          <a:p>
+            <a:pPr algn="ctr"/>
+            <a:r>
+              <a:rPr lang="en-US" sz="3000" dirty="0">
+                <a:solidFill>
+                  <a:schemeClr val="bg1"/>
+                </a:solidFill>
+                <a:latin typeface="Press Start" panose="02000009000000000000" pitchFamily="50" charset="0"/>
+              </a:rPr>
+              <a:t>TEST_SCENE_2</a:t>
             </a:r>
           </a:p>
         </p:txBody>
